--- a/public/downloads/Signal_Desk_Business_Plan.pptx
+++ b/public/downloads/Signal_Desk_Business_Plan.pptx
@@ -155,234 +155,6 @@
     </a:lvl9pPr>
   </p:defaultTextStyle>
 </p:presentation>
-</file>
-
-<file path=ppt/charts/chart1.xml><?xml version="1.0" encoding="utf-8"?>
-<c:chartSpace xmlns:c="http://schemas.openxmlformats.org/drawingml/2006/chart" xmlns:a="http://schemas.openxmlformats.org/drawingml/2006/main" xmlns:r="http://schemas.openxmlformats.org/officeDocument/2006/relationships">
-  <c:date1904 val="0"/>
-  <c:chart>
-    <c:autoTitleDeleted val="0"/>
-    <c:plotArea>
-      <c:barChart>
-        <c:barDir val="col"/>
-        <c:grouping val="clustered"/>
-        <c:ser>
-          <c:idx val="0"/>
-          <c:order val="0"/>
-          <c:tx>
-            <c:strRef>
-              <c:f>Sheet1!$B$1</c:f>
-              <c:strCache>
-                <c:ptCount val="1"/>
-                <c:pt idx="0">
-                  <c:v>Revenue</c:v>
-                </c:pt>
-              </c:strCache>
-            </c:strRef>
-          </c:tx>
-          <c:spPr>
-            <a:solidFill>
-              <a:srgbClr val="0068A0"/>
-            </a:solidFill>
-          </c:spPr>
-          <c:cat>
-            <c:strRef>
-              <c:f>Sheet1!$A$2:$A$6</c:f>
-              <c:strCache>
-                <c:ptCount val="5"/>
-                <c:pt idx="0">
-                  <c:v>Y1</c:v>
-                </c:pt>
-                <c:pt idx="1">
-                  <c:v>Y2</c:v>
-                </c:pt>
-                <c:pt idx="2">
-                  <c:v>Y3</c:v>
-                </c:pt>
-                <c:pt idx="3">
-                  <c:v>Y4</c:v>
-                </c:pt>
-                <c:pt idx="4">
-                  <c:v>Y5</c:v>
-                </c:pt>
-              </c:strCache>
-            </c:strRef>
-          </c:cat>
-          <c:val>
-            <c:numRef>
-              <c:f>Sheet1!$B$2:$B$6</c:f>
-              <c:numCache>
-                <c:formatCode>General</c:formatCode>
-                <c:ptCount val="5"/>
-                <c:pt idx="0">
-                  <c:v>7.7</c:v>
-                </c:pt>
-                <c:pt idx="1">
-                  <c:v>41.0</c:v>
-                </c:pt>
-                <c:pt idx="2">
-                  <c:v>117.5</c:v>
-                </c:pt>
-                <c:pt idx="3">
-                  <c:v>287.0</c:v>
-                </c:pt>
-                <c:pt idx="4">
-                  <c:v>581.0</c:v>
-                </c:pt>
-              </c:numCache>
-            </c:numRef>
-          </c:val>
-        </c:ser>
-        <c:ser>
-          <c:idx val="1"/>
-          <c:order val="1"/>
-          <c:tx>
-            <c:strRef>
-              <c:f>Sheet1!$C$1</c:f>
-              <c:strCache>
-                <c:ptCount val="1"/>
-                <c:pt idx="0">
-                  <c:v>EBITDA</c:v>
-                </c:pt>
-              </c:strCache>
-            </c:strRef>
-          </c:tx>
-          <c:spPr>
-            <a:solidFill>
-              <a:srgbClr val="008A68"/>
-            </a:solidFill>
-          </c:spPr>
-          <c:cat>
-            <c:strRef>
-              <c:f>Sheet1!$A$2:$A$6</c:f>
-              <c:strCache>
-                <c:ptCount val="5"/>
-                <c:pt idx="0">
-                  <c:v>Y1</c:v>
-                </c:pt>
-                <c:pt idx="1">
-                  <c:v>Y2</c:v>
-                </c:pt>
-                <c:pt idx="2">
-                  <c:v>Y3</c:v>
-                </c:pt>
-                <c:pt idx="3">
-                  <c:v>Y4</c:v>
-                </c:pt>
-                <c:pt idx="4">
-                  <c:v>Y5</c:v>
-                </c:pt>
-              </c:strCache>
-            </c:strRef>
-          </c:cat>
-          <c:val>
-            <c:numRef>
-              <c:f>Sheet1!$C$2:$C$6</c:f>
-              <c:numCache>
-                <c:formatCode>General</c:formatCode>
-                <c:ptCount val="5"/>
-                <c:pt idx="0">
-                  <c:v>-248.4</c:v>
-                </c:pt>
-                <c:pt idx="1">
-                  <c:v>-268.5</c:v>
-                </c:pt>
-                <c:pt idx="2">
-                  <c:v>-254.6</c:v>
-                </c:pt>
-                <c:pt idx="3">
-                  <c:v>-209.5</c:v>
-                </c:pt>
-                <c:pt idx="4">
-                  <c:v>5.0</c:v>
-                </c:pt>
-              </c:numCache>
-            </c:numRef>
-          </c:val>
-        </c:ser>
-        <c:axId val="2226939960"/>
-        <c:axId val="2180972856"/>
-      </c:barChart>
-      <c:catAx>
-        <c:axId val="2226939960"/>
-        <c:scaling>
-          <c:orientation val="minMax"/>
-        </c:scaling>
-        <c:delete val="0"/>
-        <c:axPos val="b"/>
-        <c:majorTickMark val="out"/>
-        <c:minorTickMark val="none"/>
-        <c:tickLblPos val="nextTo"/>
-        <c:txPr>
-          <a:bodyPr/>
-          <a:lstStyle/>
-          <a:p>
-            <a:pPr>
-              <a:defRPr sz="1200">
-                <a:latin typeface="Arial"/>
-              </a:defRPr>
-            </a:pPr>
-          </a:p>
-        </c:txPr>
-        <c:crossAx val="2180972856"/>
-        <c:crosses val="autoZero"/>
-        <c:auto val="1"/>
-        <c:lblAlgn val="ctr"/>
-        <c:lblOffset val="100"/>
-        <c:noMultiLvlLbl val="0"/>
-      </c:catAx>
-      <c:valAx>
-        <c:axId val="2180972856"/>
-        <c:scaling/>
-        <c:delete val="0"/>
-        <c:axPos val="l"/>
-        <c:majorGridlines/>
-        <c:majorTickMark val="out"/>
-        <c:minorTickMark val="none"/>
-        <c:tickLblPos val="nextTo"/>
-        <c:txPr>
-          <a:bodyPr/>
-          <a:lstStyle/>
-          <a:p>
-            <a:pPr>
-              <a:defRPr sz="1200"/>
-            </a:pPr>
-          </a:p>
-        </c:txPr>
-        <c:crossAx val="2226939960"/>
-        <c:crosses val="autoZero"/>
-      </c:valAx>
-    </c:plotArea>
-    <c:legend>
-      <c:legendPos val="b"/>
-      <c:txPr>
-        <a:bodyPr/>
-        <a:lstStyle/>
-        <a:p>
-          <a:pPr>
-            <a:defRPr sz="1200">
-              <a:latin typeface="Arial"/>
-            </a:defRPr>
-          </a:pPr>
-        </a:p>
-      </c:txPr>
-    </c:legend>
-    <c:dispBlanksAs val="gap"/>
-  </c:chart>
-  <c:txPr>
-    <a:bodyPr/>
-    <a:lstStyle/>
-    <a:p>
-      <a:pPr>
-        <a:defRPr sz="1800"/>
-      </a:pPr>
-      <a:endParaRPr lang="en-US"/>
-    </a:p>
-  </c:txPr>
-  <c:externalData r:id="rId1">
-    <c:autoUpdate val="0"/>
-  </c:externalData>
-</c:chartSpace>
 </file>
 
 <file path=ppt/notesMasters/notesMaster1.xml><?xml version="1.0" encoding="utf-8"?>
@@ -15841,7 +15613,7 @@
               </a:defRPr>
             </a:pPr>
             <a:r>
-              <a:t>Source-reference annual results in US$000; native editable chart.</a:t>
+              <a:t>Source-reference annual results in US$000; editable PowerPoint chart elements.</a:t>
             </a:r>
           </a:p>
         </p:txBody>
@@ -15924,24 +15696,49 @@
           </a:p>
         </p:txBody>
       </p:sp>
-      <p:graphicFrame>
-        <p:nvGraphicFramePr>
-          <p:cNvPr id="7" name="Chart 6"/>
-          <p:cNvGraphicFramePr>
-            <a:graphicFrameLocks noGrp="1"/>
-          </p:cNvGraphicFramePr>
-          <p:nvPr/>
-        </p:nvGraphicFramePr>
-        <p:xfrm>
-          <a:off x="594360" y="2743200"/>
-          <a:ext cx="7315200" cy="3246120"/>
-        </p:xfrm>
-        <a:graphic>
-          <a:graphicData uri="http://schemas.openxmlformats.org/drawingml/2006/chart">
-            <c:chart xmlns:c="http://schemas.openxmlformats.org/drawingml/2006/chart" r:id="rId2"/>
-          </a:graphicData>
-        </a:graphic>
-      </p:graphicFrame>
+      <p:sp>
+        <p:nvSpPr>
+          <p:cNvPr id="7" name="Rectangle 6"/>
+          <p:cNvSpPr/>
+          <p:nvPr/>
+        </p:nvSpPr>
+        <p:spPr>
+          <a:xfrm>
+            <a:off x="1051560" y="5486400"/>
+            <a:ext cx="6720840" cy="7315"/>
+          </a:xfrm>
+          <a:prstGeom prst="rect">
+            <a:avLst/>
+          </a:prstGeom>
+          <a:solidFill>
+            <a:srgbClr val="D6E0E5"/>
+          </a:solidFill>
+          <a:ln>
+            <a:noFill/>
+          </a:ln>
+        </p:spPr>
+        <p:style>
+          <a:lnRef idx="1">
+            <a:schemeClr val="accent1"/>
+          </a:lnRef>
+          <a:fillRef idx="3">
+            <a:schemeClr val="accent1"/>
+          </a:fillRef>
+          <a:effectRef idx="2">
+            <a:schemeClr val="accent1"/>
+          </a:effectRef>
+          <a:fontRef idx="minor">
+            <a:schemeClr val="lt1"/>
+          </a:fontRef>
+        </p:style>
+        <p:txBody>
+          <a:bodyPr rtlCol="0" anchor="ctr"/>
+          <a:lstStyle/>
+          <a:p>
+            <a:pPr algn="ctr"/>
+          </a:p>
+        </p:txBody>
+      </p:sp>
       <p:sp>
         <p:nvSpPr>
           <p:cNvPr id="8" name="TextBox 7"/>
@@ -15950,8 +15747,8 @@
         </p:nvSpPr>
         <p:spPr>
           <a:xfrm>
-            <a:off x="8412480" y="2926080"/>
-            <a:ext cx="3017520" cy="822960"/>
+            <a:off x="594360" y="5394960"/>
+            <a:ext cx="411480" cy="210312"/>
           </a:xfrm>
           <a:prstGeom prst="rect">
             <a:avLst/>
@@ -15968,29 +15765,72 @@
               <a:spcAft>
                 <a:spcPts val="800"/>
               </a:spcAft>
-              <a:defRPr sz="4200" b="1">
-                <a:solidFill>
-                  <a:srgbClr val="0068A0"/>
-                </a:solidFill>
-                <a:latin typeface="Arial"/>
-              </a:defRPr>
-            </a:pPr>
-            <a:r>
-              <a:t>$581k</a:t>
-            </a:r>
-          </a:p>
-        </p:txBody>
-      </p:sp>
-      <p:sp>
-        <p:nvSpPr>
-          <p:cNvPr id="9" name="TextBox 8"/>
+              <a:defRPr sz="1000" b="0">
+                <a:solidFill>
+                  <a:srgbClr val="62717D"/>
+                </a:solidFill>
+                <a:latin typeface="Arial"/>
+              </a:defRPr>
+            </a:pPr>
+            <a:r>
+              <a:t>-400</a:t>
+            </a:r>
+          </a:p>
+        </p:txBody>
+      </p:sp>
+      <p:sp>
+        <p:nvSpPr>
+          <p:cNvPr id="9" name="Rectangle 8"/>
+          <p:cNvSpPr/>
+          <p:nvPr/>
+        </p:nvSpPr>
+        <p:spPr>
+          <a:xfrm>
+            <a:off x="1051560" y="4937759"/>
+            <a:ext cx="6720840" cy="7315"/>
+          </a:xfrm>
+          <a:prstGeom prst="rect">
+            <a:avLst/>
+          </a:prstGeom>
+          <a:solidFill>
+            <a:srgbClr val="D6E0E5"/>
+          </a:solidFill>
+          <a:ln>
+            <a:noFill/>
+          </a:ln>
+        </p:spPr>
+        <p:style>
+          <a:lnRef idx="1">
+            <a:schemeClr val="accent1"/>
+          </a:lnRef>
+          <a:fillRef idx="3">
+            <a:schemeClr val="accent1"/>
+          </a:fillRef>
+          <a:effectRef idx="2">
+            <a:schemeClr val="accent1"/>
+          </a:effectRef>
+          <a:fontRef idx="minor">
+            <a:schemeClr val="lt1"/>
+          </a:fontRef>
+        </p:style>
+        <p:txBody>
+          <a:bodyPr rtlCol="0" anchor="ctr"/>
+          <a:lstStyle/>
+          <a:p>
+            <a:pPr algn="ctr"/>
+          </a:p>
+        </p:txBody>
+      </p:sp>
+      <p:sp>
+        <p:nvSpPr>
+          <p:cNvPr id="10" name="TextBox 9"/>
           <p:cNvSpPr txBox="1"/>
           <p:nvPr/>
         </p:nvSpPr>
         <p:spPr>
           <a:xfrm>
-            <a:off x="8412480" y="3749039"/>
-            <a:ext cx="3017520" cy="502920"/>
+            <a:off x="594360" y="4846320"/>
+            <a:ext cx="411480" cy="210312"/>
           </a:xfrm>
           <a:prstGeom prst="rect">
             <a:avLst/>
@@ -16007,29 +15847,72 @@
               <a:spcAft>
                 <a:spcPts val="800"/>
               </a:spcAft>
-              <a:defRPr sz="1900" b="0">
-                <a:solidFill>
-                  <a:srgbClr val="162B3A"/>
-                </a:solidFill>
-                <a:latin typeface="Arial"/>
-              </a:defRPr>
-            </a:pPr>
-            <a:r>
-              <a:t>Year-5 annual revenue</a:t>
-            </a:r>
-          </a:p>
-        </p:txBody>
-      </p:sp>
-      <p:sp>
-        <p:nvSpPr>
-          <p:cNvPr id="10" name="TextBox 9"/>
+              <a:defRPr sz="1000" b="0">
+                <a:solidFill>
+                  <a:srgbClr val="62717D"/>
+                </a:solidFill>
+                <a:latin typeface="Arial"/>
+              </a:defRPr>
+            </a:pPr>
+            <a:r>
+              <a:t>-200</a:t>
+            </a:r>
+          </a:p>
+        </p:txBody>
+      </p:sp>
+      <p:sp>
+        <p:nvSpPr>
+          <p:cNvPr id="11" name="Rectangle 10"/>
+          <p:cNvSpPr/>
+          <p:nvPr/>
+        </p:nvSpPr>
+        <p:spPr>
+          <a:xfrm>
+            <a:off x="1051560" y="4389120"/>
+            <a:ext cx="6720840" cy="7315"/>
+          </a:xfrm>
+          <a:prstGeom prst="rect">
+            <a:avLst/>
+          </a:prstGeom>
+          <a:solidFill>
+            <a:srgbClr val="D6E0E5"/>
+          </a:solidFill>
+          <a:ln>
+            <a:noFill/>
+          </a:ln>
+        </p:spPr>
+        <p:style>
+          <a:lnRef idx="1">
+            <a:schemeClr val="accent1"/>
+          </a:lnRef>
+          <a:fillRef idx="3">
+            <a:schemeClr val="accent1"/>
+          </a:fillRef>
+          <a:effectRef idx="2">
+            <a:schemeClr val="accent1"/>
+          </a:effectRef>
+          <a:fontRef idx="minor">
+            <a:schemeClr val="lt1"/>
+          </a:fontRef>
+        </p:style>
+        <p:txBody>
+          <a:bodyPr rtlCol="0" anchor="ctr"/>
+          <a:lstStyle/>
+          <a:p>
+            <a:pPr algn="ctr"/>
+          </a:p>
+        </p:txBody>
+      </p:sp>
+      <p:sp>
+        <p:nvSpPr>
+          <p:cNvPr id="12" name="TextBox 11"/>
           <p:cNvSpPr txBox="1"/>
           <p:nvPr/>
         </p:nvSpPr>
         <p:spPr>
           <a:xfrm>
-            <a:off x="8412480" y="4572000"/>
-            <a:ext cx="3017520" cy="731520"/>
+            <a:off x="594360" y="4297680"/>
+            <a:ext cx="411480" cy="210312"/>
           </a:xfrm>
           <a:prstGeom prst="rect">
             <a:avLst/>
@@ -16046,6 +15929,1158 @@
               <a:spcAft>
                 <a:spcPts val="800"/>
               </a:spcAft>
+              <a:defRPr sz="1000" b="0">
+                <a:solidFill>
+                  <a:srgbClr val="62717D"/>
+                </a:solidFill>
+                <a:latin typeface="Arial"/>
+              </a:defRPr>
+            </a:pPr>
+            <a:r>
+              <a:t>0</a:t>
+            </a:r>
+          </a:p>
+        </p:txBody>
+      </p:sp>
+      <p:sp>
+        <p:nvSpPr>
+          <p:cNvPr id="13" name="Rectangle 12"/>
+          <p:cNvSpPr/>
+          <p:nvPr/>
+        </p:nvSpPr>
+        <p:spPr>
+          <a:xfrm>
+            <a:off x="1051560" y="3840480"/>
+            <a:ext cx="6720840" cy="7315"/>
+          </a:xfrm>
+          <a:prstGeom prst="rect">
+            <a:avLst/>
+          </a:prstGeom>
+          <a:solidFill>
+            <a:srgbClr val="D6E0E5"/>
+          </a:solidFill>
+          <a:ln>
+            <a:noFill/>
+          </a:ln>
+        </p:spPr>
+        <p:style>
+          <a:lnRef idx="1">
+            <a:schemeClr val="accent1"/>
+          </a:lnRef>
+          <a:fillRef idx="3">
+            <a:schemeClr val="accent1"/>
+          </a:fillRef>
+          <a:effectRef idx="2">
+            <a:schemeClr val="accent1"/>
+          </a:effectRef>
+          <a:fontRef idx="minor">
+            <a:schemeClr val="lt1"/>
+          </a:fontRef>
+        </p:style>
+        <p:txBody>
+          <a:bodyPr rtlCol="0" anchor="ctr"/>
+          <a:lstStyle/>
+          <a:p>
+            <a:pPr algn="ctr"/>
+          </a:p>
+        </p:txBody>
+      </p:sp>
+      <p:sp>
+        <p:nvSpPr>
+          <p:cNvPr id="14" name="TextBox 13"/>
+          <p:cNvSpPr txBox="1"/>
+          <p:nvPr/>
+        </p:nvSpPr>
+        <p:spPr>
+          <a:xfrm>
+            <a:off x="594360" y="3749040"/>
+            <a:ext cx="411480" cy="210312"/>
+          </a:xfrm>
+          <a:prstGeom prst="rect">
+            <a:avLst/>
+          </a:prstGeom>
+          <a:noFill/>
+        </p:spPr>
+        <p:txBody>
+          <a:bodyPr wrap="square" lIns="0" rIns="0" tIns="0" bIns="0">
+            <a:spAutoFit/>
+          </a:bodyPr>
+          <a:lstStyle/>
+          <a:p>
+            <a:pPr>
+              <a:spcAft>
+                <a:spcPts val="800"/>
+              </a:spcAft>
+              <a:defRPr sz="1000" b="0">
+                <a:solidFill>
+                  <a:srgbClr val="62717D"/>
+                </a:solidFill>
+                <a:latin typeface="Arial"/>
+              </a:defRPr>
+            </a:pPr>
+            <a:r>
+              <a:t>200</a:t>
+            </a:r>
+          </a:p>
+        </p:txBody>
+      </p:sp>
+      <p:sp>
+        <p:nvSpPr>
+          <p:cNvPr id="15" name="Rectangle 14"/>
+          <p:cNvSpPr/>
+          <p:nvPr/>
+        </p:nvSpPr>
+        <p:spPr>
+          <a:xfrm>
+            <a:off x="1051560" y="3291839"/>
+            <a:ext cx="6720840" cy="7315"/>
+          </a:xfrm>
+          <a:prstGeom prst="rect">
+            <a:avLst/>
+          </a:prstGeom>
+          <a:solidFill>
+            <a:srgbClr val="D6E0E5"/>
+          </a:solidFill>
+          <a:ln>
+            <a:noFill/>
+          </a:ln>
+        </p:spPr>
+        <p:style>
+          <a:lnRef idx="1">
+            <a:schemeClr val="accent1"/>
+          </a:lnRef>
+          <a:fillRef idx="3">
+            <a:schemeClr val="accent1"/>
+          </a:fillRef>
+          <a:effectRef idx="2">
+            <a:schemeClr val="accent1"/>
+          </a:effectRef>
+          <a:fontRef idx="minor">
+            <a:schemeClr val="lt1"/>
+          </a:fontRef>
+        </p:style>
+        <p:txBody>
+          <a:bodyPr rtlCol="0" anchor="ctr"/>
+          <a:lstStyle/>
+          <a:p>
+            <a:pPr algn="ctr"/>
+          </a:p>
+        </p:txBody>
+      </p:sp>
+      <p:sp>
+        <p:nvSpPr>
+          <p:cNvPr id="16" name="TextBox 15"/>
+          <p:cNvSpPr txBox="1"/>
+          <p:nvPr/>
+        </p:nvSpPr>
+        <p:spPr>
+          <a:xfrm>
+            <a:off x="594360" y="3200399"/>
+            <a:ext cx="411480" cy="210312"/>
+          </a:xfrm>
+          <a:prstGeom prst="rect">
+            <a:avLst/>
+          </a:prstGeom>
+          <a:noFill/>
+        </p:spPr>
+        <p:txBody>
+          <a:bodyPr wrap="square" lIns="0" rIns="0" tIns="0" bIns="0">
+            <a:spAutoFit/>
+          </a:bodyPr>
+          <a:lstStyle/>
+          <a:p>
+            <a:pPr>
+              <a:spcAft>
+                <a:spcPts val="800"/>
+              </a:spcAft>
+              <a:defRPr sz="1000" b="0">
+                <a:solidFill>
+                  <a:srgbClr val="62717D"/>
+                </a:solidFill>
+                <a:latin typeface="Arial"/>
+              </a:defRPr>
+            </a:pPr>
+            <a:r>
+              <a:t>400</a:t>
+            </a:r>
+          </a:p>
+        </p:txBody>
+      </p:sp>
+      <p:sp>
+        <p:nvSpPr>
+          <p:cNvPr id="17" name="Rectangle 16"/>
+          <p:cNvSpPr/>
+          <p:nvPr/>
+        </p:nvSpPr>
+        <p:spPr>
+          <a:xfrm>
+            <a:off x="1051560" y="2743200"/>
+            <a:ext cx="6720840" cy="7315"/>
+          </a:xfrm>
+          <a:prstGeom prst="rect">
+            <a:avLst/>
+          </a:prstGeom>
+          <a:solidFill>
+            <a:srgbClr val="D6E0E5"/>
+          </a:solidFill>
+          <a:ln>
+            <a:noFill/>
+          </a:ln>
+        </p:spPr>
+        <p:style>
+          <a:lnRef idx="1">
+            <a:schemeClr val="accent1"/>
+          </a:lnRef>
+          <a:fillRef idx="3">
+            <a:schemeClr val="accent1"/>
+          </a:fillRef>
+          <a:effectRef idx="2">
+            <a:schemeClr val="accent1"/>
+          </a:effectRef>
+          <a:fontRef idx="minor">
+            <a:schemeClr val="lt1"/>
+          </a:fontRef>
+        </p:style>
+        <p:txBody>
+          <a:bodyPr rtlCol="0" anchor="ctr"/>
+          <a:lstStyle/>
+          <a:p>
+            <a:pPr algn="ctr"/>
+          </a:p>
+        </p:txBody>
+      </p:sp>
+      <p:sp>
+        <p:nvSpPr>
+          <p:cNvPr id="18" name="TextBox 17"/>
+          <p:cNvSpPr txBox="1"/>
+          <p:nvPr/>
+        </p:nvSpPr>
+        <p:spPr>
+          <a:xfrm>
+            <a:off x="594360" y="2651760"/>
+            <a:ext cx="411480" cy="210312"/>
+          </a:xfrm>
+          <a:prstGeom prst="rect">
+            <a:avLst/>
+          </a:prstGeom>
+          <a:noFill/>
+        </p:spPr>
+        <p:txBody>
+          <a:bodyPr wrap="square" lIns="0" rIns="0" tIns="0" bIns="0">
+            <a:spAutoFit/>
+          </a:bodyPr>
+          <a:lstStyle/>
+          <a:p>
+            <a:pPr>
+              <a:spcAft>
+                <a:spcPts val="800"/>
+              </a:spcAft>
+              <a:defRPr sz="1000" b="0">
+                <a:solidFill>
+                  <a:srgbClr val="62717D"/>
+                </a:solidFill>
+                <a:latin typeface="Arial"/>
+              </a:defRPr>
+            </a:pPr>
+            <a:r>
+              <a:t>600</a:t>
+            </a:r>
+          </a:p>
+        </p:txBody>
+      </p:sp>
+      <p:sp>
+        <p:nvSpPr>
+          <p:cNvPr id="19" name="Rectangle 18"/>
+          <p:cNvSpPr/>
+          <p:nvPr/>
+        </p:nvSpPr>
+        <p:spPr>
+          <a:xfrm>
+            <a:off x="1449323" y="4367997"/>
+            <a:ext cx="237744" cy="21122"/>
+          </a:xfrm>
+          <a:prstGeom prst="rect">
+            <a:avLst/>
+          </a:prstGeom>
+          <a:solidFill>
+            <a:srgbClr val="0068A0"/>
+          </a:solidFill>
+          <a:ln>
+            <a:noFill/>
+          </a:ln>
+        </p:spPr>
+        <p:style>
+          <a:lnRef idx="1">
+            <a:schemeClr val="accent1"/>
+          </a:lnRef>
+          <a:fillRef idx="3">
+            <a:schemeClr val="accent1"/>
+          </a:fillRef>
+          <a:effectRef idx="2">
+            <a:schemeClr val="accent1"/>
+          </a:effectRef>
+          <a:fontRef idx="minor">
+            <a:schemeClr val="lt1"/>
+          </a:fontRef>
+        </p:style>
+        <p:txBody>
+          <a:bodyPr rtlCol="0" anchor="ctr"/>
+          <a:lstStyle/>
+          <a:p>
+            <a:pPr algn="ctr"/>
+          </a:p>
+        </p:txBody>
+      </p:sp>
+      <p:sp>
+        <p:nvSpPr>
+          <p:cNvPr id="20" name="Rectangle 19"/>
+          <p:cNvSpPr/>
+          <p:nvPr/>
+        </p:nvSpPr>
+        <p:spPr>
+          <a:xfrm>
+            <a:off x="1732787" y="4389120"/>
+            <a:ext cx="237744" cy="681410"/>
+          </a:xfrm>
+          <a:prstGeom prst="rect">
+            <a:avLst/>
+          </a:prstGeom>
+          <a:solidFill>
+            <a:srgbClr val="008A68"/>
+          </a:solidFill>
+          <a:ln>
+            <a:noFill/>
+          </a:ln>
+        </p:spPr>
+        <p:style>
+          <a:lnRef idx="1">
+            <a:schemeClr val="accent1"/>
+          </a:lnRef>
+          <a:fillRef idx="3">
+            <a:schemeClr val="accent1"/>
+          </a:fillRef>
+          <a:effectRef idx="2">
+            <a:schemeClr val="accent1"/>
+          </a:effectRef>
+          <a:fontRef idx="minor">
+            <a:schemeClr val="lt1"/>
+          </a:fontRef>
+        </p:style>
+        <p:txBody>
+          <a:bodyPr rtlCol="0" anchor="ctr"/>
+          <a:lstStyle/>
+          <a:p>
+            <a:pPr algn="ctr"/>
+          </a:p>
+        </p:txBody>
+      </p:sp>
+      <p:sp>
+        <p:nvSpPr>
+          <p:cNvPr id="21" name="TextBox 20"/>
+          <p:cNvSpPr txBox="1"/>
+          <p:nvPr/>
+        </p:nvSpPr>
+        <p:spPr>
+          <a:xfrm>
+            <a:off x="1540763" y="5541264"/>
+            <a:ext cx="502920" cy="228600"/>
+          </a:xfrm>
+          <a:prstGeom prst="rect">
+            <a:avLst/>
+          </a:prstGeom>
+          <a:noFill/>
+        </p:spPr>
+        <p:txBody>
+          <a:bodyPr wrap="square" lIns="0" rIns="0" tIns="0" bIns="0">
+            <a:spAutoFit/>
+          </a:bodyPr>
+          <a:lstStyle/>
+          <a:p>
+            <a:pPr>
+              <a:spcAft>
+                <a:spcPts val="800"/>
+              </a:spcAft>
+              <a:defRPr sz="1100" b="0">
+                <a:solidFill>
+                  <a:srgbClr val="62717D"/>
+                </a:solidFill>
+                <a:latin typeface="Arial"/>
+              </a:defRPr>
+            </a:pPr>
+            <a:r>
+              <a:t>Y1</a:t>
+            </a:r>
+          </a:p>
+        </p:txBody>
+      </p:sp>
+      <p:sp>
+        <p:nvSpPr>
+          <p:cNvPr id="22" name="Rectangle 21"/>
+          <p:cNvSpPr/>
+          <p:nvPr/>
+        </p:nvSpPr>
+        <p:spPr>
+          <a:xfrm>
+            <a:off x="2793491" y="4276648"/>
+            <a:ext cx="237744" cy="112471"/>
+          </a:xfrm>
+          <a:prstGeom prst="rect">
+            <a:avLst/>
+          </a:prstGeom>
+          <a:solidFill>
+            <a:srgbClr val="0068A0"/>
+          </a:solidFill>
+          <a:ln>
+            <a:noFill/>
+          </a:ln>
+        </p:spPr>
+        <p:style>
+          <a:lnRef idx="1">
+            <a:schemeClr val="accent1"/>
+          </a:lnRef>
+          <a:fillRef idx="3">
+            <a:schemeClr val="accent1"/>
+          </a:fillRef>
+          <a:effectRef idx="2">
+            <a:schemeClr val="accent1"/>
+          </a:effectRef>
+          <a:fontRef idx="minor">
+            <a:schemeClr val="lt1"/>
+          </a:fontRef>
+        </p:style>
+        <p:txBody>
+          <a:bodyPr rtlCol="0" anchor="ctr"/>
+          <a:lstStyle/>
+          <a:p>
+            <a:pPr algn="ctr"/>
+          </a:p>
+        </p:txBody>
+      </p:sp>
+      <p:sp>
+        <p:nvSpPr>
+          <p:cNvPr id="23" name="Rectangle 22"/>
+          <p:cNvSpPr/>
+          <p:nvPr/>
+        </p:nvSpPr>
+        <p:spPr>
+          <a:xfrm>
+            <a:off x="3076956" y="4389120"/>
+            <a:ext cx="237744" cy="736549"/>
+          </a:xfrm>
+          <a:prstGeom prst="rect">
+            <a:avLst/>
+          </a:prstGeom>
+          <a:solidFill>
+            <a:srgbClr val="008A68"/>
+          </a:solidFill>
+          <a:ln>
+            <a:noFill/>
+          </a:ln>
+        </p:spPr>
+        <p:style>
+          <a:lnRef idx="1">
+            <a:schemeClr val="accent1"/>
+          </a:lnRef>
+          <a:fillRef idx="3">
+            <a:schemeClr val="accent1"/>
+          </a:fillRef>
+          <a:effectRef idx="2">
+            <a:schemeClr val="accent1"/>
+          </a:effectRef>
+          <a:fontRef idx="minor">
+            <a:schemeClr val="lt1"/>
+          </a:fontRef>
+        </p:style>
+        <p:txBody>
+          <a:bodyPr rtlCol="0" anchor="ctr"/>
+          <a:lstStyle/>
+          <a:p>
+            <a:pPr algn="ctr"/>
+          </a:p>
+        </p:txBody>
+      </p:sp>
+      <p:sp>
+        <p:nvSpPr>
+          <p:cNvPr id="24" name="TextBox 23"/>
+          <p:cNvSpPr txBox="1"/>
+          <p:nvPr/>
+        </p:nvSpPr>
+        <p:spPr>
+          <a:xfrm>
+            <a:off x="2884931" y="5541264"/>
+            <a:ext cx="502920" cy="228600"/>
+          </a:xfrm>
+          <a:prstGeom prst="rect">
+            <a:avLst/>
+          </a:prstGeom>
+          <a:noFill/>
+        </p:spPr>
+        <p:txBody>
+          <a:bodyPr wrap="square" lIns="0" rIns="0" tIns="0" bIns="0">
+            <a:spAutoFit/>
+          </a:bodyPr>
+          <a:lstStyle/>
+          <a:p>
+            <a:pPr>
+              <a:spcAft>
+                <a:spcPts val="800"/>
+              </a:spcAft>
+              <a:defRPr sz="1100" b="0">
+                <a:solidFill>
+                  <a:srgbClr val="62717D"/>
+                </a:solidFill>
+                <a:latin typeface="Arial"/>
+              </a:defRPr>
+            </a:pPr>
+            <a:r>
+              <a:t>Y2</a:t>
+            </a:r>
+          </a:p>
+        </p:txBody>
+      </p:sp>
+      <p:sp>
+        <p:nvSpPr>
+          <p:cNvPr id="25" name="Rectangle 24"/>
+          <p:cNvSpPr/>
+          <p:nvPr/>
+        </p:nvSpPr>
+        <p:spPr>
+          <a:xfrm>
+            <a:off x="4137659" y="4066794"/>
+            <a:ext cx="237744" cy="322326"/>
+          </a:xfrm>
+          <a:prstGeom prst="rect">
+            <a:avLst/>
+          </a:prstGeom>
+          <a:solidFill>
+            <a:srgbClr val="0068A0"/>
+          </a:solidFill>
+          <a:ln>
+            <a:noFill/>
+          </a:ln>
+        </p:spPr>
+        <p:style>
+          <a:lnRef idx="1">
+            <a:schemeClr val="accent1"/>
+          </a:lnRef>
+          <a:fillRef idx="3">
+            <a:schemeClr val="accent1"/>
+          </a:fillRef>
+          <a:effectRef idx="2">
+            <a:schemeClr val="accent1"/>
+          </a:effectRef>
+          <a:fontRef idx="minor">
+            <a:schemeClr val="lt1"/>
+          </a:fontRef>
+        </p:style>
+        <p:txBody>
+          <a:bodyPr rtlCol="0" anchor="ctr"/>
+          <a:lstStyle/>
+          <a:p>
+            <a:pPr algn="ctr"/>
+          </a:p>
+        </p:txBody>
+      </p:sp>
+      <p:sp>
+        <p:nvSpPr>
+          <p:cNvPr id="26" name="Rectangle 25"/>
+          <p:cNvSpPr/>
+          <p:nvPr/>
+        </p:nvSpPr>
+        <p:spPr>
+          <a:xfrm>
+            <a:off x="4421123" y="4389120"/>
+            <a:ext cx="237744" cy="698418"/>
+          </a:xfrm>
+          <a:prstGeom prst="rect">
+            <a:avLst/>
+          </a:prstGeom>
+          <a:solidFill>
+            <a:srgbClr val="008A68"/>
+          </a:solidFill>
+          <a:ln>
+            <a:noFill/>
+          </a:ln>
+        </p:spPr>
+        <p:style>
+          <a:lnRef idx="1">
+            <a:schemeClr val="accent1"/>
+          </a:lnRef>
+          <a:fillRef idx="3">
+            <a:schemeClr val="accent1"/>
+          </a:fillRef>
+          <a:effectRef idx="2">
+            <a:schemeClr val="accent1"/>
+          </a:effectRef>
+          <a:fontRef idx="minor">
+            <a:schemeClr val="lt1"/>
+          </a:fontRef>
+        </p:style>
+        <p:txBody>
+          <a:bodyPr rtlCol="0" anchor="ctr"/>
+          <a:lstStyle/>
+          <a:p>
+            <a:pPr algn="ctr"/>
+          </a:p>
+        </p:txBody>
+      </p:sp>
+      <p:sp>
+        <p:nvSpPr>
+          <p:cNvPr id="27" name="TextBox 26"/>
+          <p:cNvSpPr txBox="1"/>
+          <p:nvPr/>
+        </p:nvSpPr>
+        <p:spPr>
+          <a:xfrm>
+            <a:off x="4229099" y="5541264"/>
+            <a:ext cx="502920" cy="228600"/>
+          </a:xfrm>
+          <a:prstGeom prst="rect">
+            <a:avLst/>
+          </a:prstGeom>
+          <a:noFill/>
+        </p:spPr>
+        <p:txBody>
+          <a:bodyPr wrap="square" lIns="0" rIns="0" tIns="0" bIns="0">
+            <a:spAutoFit/>
+          </a:bodyPr>
+          <a:lstStyle/>
+          <a:p>
+            <a:pPr>
+              <a:spcAft>
+                <a:spcPts val="800"/>
+              </a:spcAft>
+              <a:defRPr sz="1100" b="0">
+                <a:solidFill>
+                  <a:srgbClr val="62717D"/>
+                </a:solidFill>
+                <a:latin typeface="Arial"/>
+              </a:defRPr>
+            </a:pPr>
+            <a:r>
+              <a:t>Y3</a:t>
+            </a:r>
+          </a:p>
+        </p:txBody>
+      </p:sp>
+      <p:sp>
+        <p:nvSpPr>
+          <p:cNvPr id="28" name="Rectangle 27"/>
+          <p:cNvSpPr/>
+          <p:nvPr/>
+        </p:nvSpPr>
+        <p:spPr>
+          <a:xfrm>
+            <a:off x="5481828" y="3601821"/>
+            <a:ext cx="237744" cy="787298"/>
+          </a:xfrm>
+          <a:prstGeom prst="rect">
+            <a:avLst/>
+          </a:prstGeom>
+          <a:solidFill>
+            <a:srgbClr val="0068A0"/>
+          </a:solidFill>
+          <a:ln>
+            <a:noFill/>
+          </a:ln>
+        </p:spPr>
+        <p:style>
+          <a:lnRef idx="1">
+            <a:schemeClr val="accent1"/>
+          </a:lnRef>
+          <a:fillRef idx="3">
+            <a:schemeClr val="accent1"/>
+          </a:fillRef>
+          <a:effectRef idx="2">
+            <a:schemeClr val="accent1"/>
+          </a:effectRef>
+          <a:fontRef idx="minor">
+            <a:schemeClr val="lt1"/>
+          </a:fontRef>
+        </p:style>
+        <p:txBody>
+          <a:bodyPr rtlCol="0" anchor="ctr"/>
+          <a:lstStyle/>
+          <a:p>
+            <a:pPr algn="ctr"/>
+          </a:p>
+        </p:txBody>
+      </p:sp>
+      <p:sp>
+        <p:nvSpPr>
+          <p:cNvPr id="29" name="Rectangle 28"/>
+          <p:cNvSpPr/>
+          <p:nvPr/>
+        </p:nvSpPr>
+        <p:spPr>
+          <a:xfrm>
+            <a:off x="5765292" y="4389120"/>
+            <a:ext cx="237744" cy="574700"/>
+          </a:xfrm>
+          <a:prstGeom prst="rect">
+            <a:avLst/>
+          </a:prstGeom>
+          <a:solidFill>
+            <a:srgbClr val="008A68"/>
+          </a:solidFill>
+          <a:ln>
+            <a:noFill/>
+          </a:ln>
+        </p:spPr>
+        <p:style>
+          <a:lnRef idx="1">
+            <a:schemeClr val="accent1"/>
+          </a:lnRef>
+          <a:fillRef idx="3">
+            <a:schemeClr val="accent1"/>
+          </a:fillRef>
+          <a:effectRef idx="2">
+            <a:schemeClr val="accent1"/>
+          </a:effectRef>
+          <a:fontRef idx="minor">
+            <a:schemeClr val="lt1"/>
+          </a:fontRef>
+        </p:style>
+        <p:txBody>
+          <a:bodyPr rtlCol="0" anchor="ctr"/>
+          <a:lstStyle/>
+          <a:p>
+            <a:pPr algn="ctr"/>
+          </a:p>
+        </p:txBody>
+      </p:sp>
+      <p:sp>
+        <p:nvSpPr>
+          <p:cNvPr id="30" name="TextBox 29"/>
+          <p:cNvSpPr txBox="1"/>
+          <p:nvPr/>
+        </p:nvSpPr>
+        <p:spPr>
+          <a:xfrm>
+            <a:off x="5573268" y="5541264"/>
+            <a:ext cx="502920" cy="228600"/>
+          </a:xfrm>
+          <a:prstGeom prst="rect">
+            <a:avLst/>
+          </a:prstGeom>
+          <a:noFill/>
+        </p:spPr>
+        <p:txBody>
+          <a:bodyPr wrap="square" lIns="0" rIns="0" tIns="0" bIns="0">
+            <a:spAutoFit/>
+          </a:bodyPr>
+          <a:lstStyle/>
+          <a:p>
+            <a:pPr>
+              <a:spcAft>
+                <a:spcPts val="800"/>
+              </a:spcAft>
+              <a:defRPr sz="1100" b="0">
+                <a:solidFill>
+                  <a:srgbClr val="62717D"/>
+                </a:solidFill>
+                <a:latin typeface="Arial"/>
+              </a:defRPr>
+            </a:pPr>
+            <a:r>
+              <a:t>Y4</a:t>
+            </a:r>
+          </a:p>
+        </p:txBody>
+      </p:sp>
+      <p:sp>
+        <p:nvSpPr>
+          <p:cNvPr id="31" name="Rectangle 30"/>
+          <p:cNvSpPr/>
+          <p:nvPr/>
+        </p:nvSpPr>
+        <p:spPr>
+          <a:xfrm>
+            <a:off x="6825995" y="2795320"/>
+            <a:ext cx="237744" cy="1593799"/>
+          </a:xfrm>
+          <a:prstGeom prst="rect">
+            <a:avLst/>
+          </a:prstGeom>
+          <a:solidFill>
+            <a:srgbClr val="0068A0"/>
+          </a:solidFill>
+          <a:ln>
+            <a:noFill/>
+          </a:ln>
+        </p:spPr>
+        <p:style>
+          <a:lnRef idx="1">
+            <a:schemeClr val="accent1"/>
+          </a:lnRef>
+          <a:fillRef idx="3">
+            <a:schemeClr val="accent1"/>
+          </a:fillRef>
+          <a:effectRef idx="2">
+            <a:schemeClr val="accent1"/>
+          </a:effectRef>
+          <a:fontRef idx="minor">
+            <a:schemeClr val="lt1"/>
+          </a:fontRef>
+        </p:style>
+        <p:txBody>
+          <a:bodyPr rtlCol="0" anchor="ctr"/>
+          <a:lstStyle/>
+          <a:p>
+            <a:pPr algn="ctr"/>
+          </a:p>
+        </p:txBody>
+      </p:sp>
+      <p:sp>
+        <p:nvSpPr>
+          <p:cNvPr id="32" name="Rectangle 31"/>
+          <p:cNvSpPr/>
+          <p:nvPr/>
+        </p:nvSpPr>
+        <p:spPr>
+          <a:xfrm>
+            <a:off x="7109459" y="4375404"/>
+            <a:ext cx="237744" cy="13716"/>
+          </a:xfrm>
+          <a:prstGeom prst="rect">
+            <a:avLst/>
+          </a:prstGeom>
+          <a:solidFill>
+            <a:srgbClr val="008A68"/>
+          </a:solidFill>
+          <a:ln>
+            <a:noFill/>
+          </a:ln>
+        </p:spPr>
+        <p:style>
+          <a:lnRef idx="1">
+            <a:schemeClr val="accent1"/>
+          </a:lnRef>
+          <a:fillRef idx="3">
+            <a:schemeClr val="accent1"/>
+          </a:fillRef>
+          <a:effectRef idx="2">
+            <a:schemeClr val="accent1"/>
+          </a:effectRef>
+          <a:fontRef idx="minor">
+            <a:schemeClr val="lt1"/>
+          </a:fontRef>
+        </p:style>
+        <p:txBody>
+          <a:bodyPr rtlCol="0" anchor="ctr"/>
+          <a:lstStyle/>
+          <a:p>
+            <a:pPr algn="ctr"/>
+          </a:p>
+        </p:txBody>
+      </p:sp>
+      <p:sp>
+        <p:nvSpPr>
+          <p:cNvPr id="33" name="TextBox 32"/>
+          <p:cNvSpPr txBox="1"/>
+          <p:nvPr/>
+        </p:nvSpPr>
+        <p:spPr>
+          <a:xfrm>
+            <a:off x="6917435" y="5541264"/>
+            <a:ext cx="502920" cy="228600"/>
+          </a:xfrm>
+          <a:prstGeom prst="rect">
+            <a:avLst/>
+          </a:prstGeom>
+          <a:noFill/>
+        </p:spPr>
+        <p:txBody>
+          <a:bodyPr wrap="square" lIns="0" rIns="0" tIns="0" bIns="0">
+            <a:spAutoFit/>
+          </a:bodyPr>
+          <a:lstStyle/>
+          <a:p>
+            <a:pPr>
+              <a:spcAft>
+                <a:spcPts val="800"/>
+              </a:spcAft>
+              <a:defRPr sz="1100" b="0">
+                <a:solidFill>
+                  <a:srgbClr val="62717D"/>
+                </a:solidFill>
+                <a:latin typeface="Arial"/>
+              </a:defRPr>
+            </a:pPr>
+            <a:r>
+              <a:t>Y5</a:t>
+            </a:r>
+          </a:p>
+        </p:txBody>
+      </p:sp>
+      <p:sp>
+        <p:nvSpPr>
+          <p:cNvPr id="34" name="Rectangle 33"/>
+          <p:cNvSpPr/>
+          <p:nvPr/>
+        </p:nvSpPr>
+        <p:spPr>
+          <a:xfrm>
+            <a:off x="2514600" y="5843016"/>
+            <a:ext cx="146304" cy="109728"/>
+          </a:xfrm>
+          <a:prstGeom prst="rect">
+            <a:avLst/>
+          </a:prstGeom>
+          <a:solidFill>
+            <a:srgbClr val="0068A0"/>
+          </a:solidFill>
+          <a:ln>
+            <a:noFill/>
+          </a:ln>
+        </p:spPr>
+        <p:style>
+          <a:lnRef idx="1">
+            <a:schemeClr val="accent1"/>
+          </a:lnRef>
+          <a:fillRef idx="3">
+            <a:schemeClr val="accent1"/>
+          </a:fillRef>
+          <a:effectRef idx="2">
+            <a:schemeClr val="accent1"/>
+          </a:effectRef>
+          <a:fontRef idx="minor">
+            <a:schemeClr val="lt1"/>
+          </a:fontRef>
+        </p:style>
+        <p:txBody>
+          <a:bodyPr rtlCol="0" anchor="ctr"/>
+          <a:lstStyle/>
+          <a:p>
+            <a:pPr algn="ctr"/>
+          </a:p>
+        </p:txBody>
+      </p:sp>
+      <p:sp>
+        <p:nvSpPr>
+          <p:cNvPr id="35" name="TextBox 34"/>
+          <p:cNvSpPr txBox="1"/>
+          <p:nvPr/>
+        </p:nvSpPr>
+        <p:spPr>
+          <a:xfrm>
+            <a:off x="2743200" y="5797296"/>
+            <a:ext cx="1371600" cy="228600"/>
+          </a:xfrm>
+          <a:prstGeom prst="rect">
+            <a:avLst/>
+          </a:prstGeom>
+          <a:noFill/>
+        </p:spPr>
+        <p:txBody>
+          <a:bodyPr wrap="square" lIns="0" rIns="0" tIns="0" bIns="0">
+            <a:spAutoFit/>
+          </a:bodyPr>
+          <a:lstStyle/>
+          <a:p>
+            <a:pPr>
+              <a:spcAft>
+                <a:spcPts val="800"/>
+              </a:spcAft>
+              <a:defRPr sz="1100" b="0">
+                <a:solidFill>
+                  <a:srgbClr val="62717D"/>
+                </a:solidFill>
+                <a:latin typeface="Arial"/>
+              </a:defRPr>
+            </a:pPr>
+            <a:r>
+              <a:t>Revenue</a:t>
+            </a:r>
+          </a:p>
+        </p:txBody>
+      </p:sp>
+      <p:sp>
+        <p:nvSpPr>
+          <p:cNvPr id="36" name="Rectangle 35"/>
+          <p:cNvSpPr/>
+          <p:nvPr/>
+        </p:nvSpPr>
+        <p:spPr>
+          <a:xfrm>
+            <a:off x="3977639" y="5843016"/>
+            <a:ext cx="146304" cy="109728"/>
+          </a:xfrm>
+          <a:prstGeom prst="rect">
+            <a:avLst/>
+          </a:prstGeom>
+          <a:solidFill>
+            <a:srgbClr val="008A68"/>
+          </a:solidFill>
+          <a:ln>
+            <a:noFill/>
+          </a:ln>
+        </p:spPr>
+        <p:style>
+          <a:lnRef idx="1">
+            <a:schemeClr val="accent1"/>
+          </a:lnRef>
+          <a:fillRef idx="3">
+            <a:schemeClr val="accent1"/>
+          </a:fillRef>
+          <a:effectRef idx="2">
+            <a:schemeClr val="accent1"/>
+          </a:effectRef>
+          <a:fontRef idx="minor">
+            <a:schemeClr val="lt1"/>
+          </a:fontRef>
+        </p:style>
+        <p:txBody>
+          <a:bodyPr rtlCol="0" anchor="ctr"/>
+          <a:lstStyle/>
+          <a:p>
+            <a:pPr algn="ctr"/>
+          </a:p>
+        </p:txBody>
+      </p:sp>
+      <p:sp>
+        <p:nvSpPr>
+          <p:cNvPr id="37" name="TextBox 36"/>
+          <p:cNvSpPr txBox="1"/>
+          <p:nvPr/>
+        </p:nvSpPr>
+        <p:spPr>
+          <a:xfrm>
+            <a:off x="4206240" y="5797296"/>
+            <a:ext cx="1371600" cy="228600"/>
+          </a:xfrm>
+          <a:prstGeom prst="rect">
+            <a:avLst/>
+          </a:prstGeom>
+          <a:noFill/>
+        </p:spPr>
+        <p:txBody>
+          <a:bodyPr wrap="square" lIns="0" rIns="0" tIns="0" bIns="0">
+            <a:spAutoFit/>
+          </a:bodyPr>
+          <a:lstStyle/>
+          <a:p>
+            <a:pPr>
+              <a:spcAft>
+                <a:spcPts val="800"/>
+              </a:spcAft>
+              <a:defRPr sz="1100" b="0">
+                <a:solidFill>
+                  <a:srgbClr val="62717D"/>
+                </a:solidFill>
+                <a:latin typeface="Arial"/>
+              </a:defRPr>
+            </a:pPr>
+            <a:r>
+              <a:t>EBITDA</a:t>
+            </a:r>
+          </a:p>
+        </p:txBody>
+      </p:sp>
+      <p:sp>
+        <p:nvSpPr>
+          <p:cNvPr id="38" name="TextBox 37"/>
+          <p:cNvSpPr txBox="1"/>
+          <p:nvPr/>
+        </p:nvSpPr>
+        <p:spPr>
+          <a:xfrm>
+            <a:off x="8412480" y="2926080"/>
+            <a:ext cx="3017520" cy="822960"/>
+          </a:xfrm>
+          <a:prstGeom prst="rect">
+            <a:avLst/>
+          </a:prstGeom>
+          <a:noFill/>
+        </p:spPr>
+        <p:txBody>
+          <a:bodyPr wrap="square" lIns="0" rIns="0" tIns="0" bIns="0">
+            <a:spAutoFit/>
+          </a:bodyPr>
+          <a:lstStyle/>
+          <a:p>
+            <a:pPr>
+              <a:spcAft>
+                <a:spcPts val="800"/>
+              </a:spcAft>
+              <a:defRPr sz="4200" b="1">
+                <a:solidFill>
+                  <a:srgbClr val="0068A0"/>
+                </a:solidFill>
+                <a:latin typeface="Arial"/>
+              </a:defRPr>
+            </a:pPr>
+            <a:r>
+              <a:t>$581k</a:t>
+            </a:r>
+          </a:p>
+        </p:txBody>
+      </p:sp>
+      <p:sp>
+        <p:nvSpPr>
+          <p:cNvPr id="39" name="TextBox 38"/>
+          <p:cNvSpPr txBox="1"/>
+          <p:nvPr/>
+        </p:nvSpPr>
+        <p:spPr>
+          <a:xfrm>
+            <a:off x="8412480" y="3749039"/>
+            <a:ext cx="3017520" cy="502920"/>
+          </a:xfrm>
+          <a:prstGeom prst="rect">
+            <a:avLst/>
+          </a:prstGeom>
+          <a:noFill/>
+        </p:spPr>
+        <p:txBody>
+          <a:bodyPr wrap="square" lIns="0" rIns="0" tIns="0" bIns="0">
+            <a:spAutoFit/>
+          </a:bodyPr>
+          <a:lstStyle/>
+          <a:p>
+            <a:pPr>
+              <a:spcAft>
+                <a:spcPts val="800"/>
+              </a:spcAft>
+              <a:defRPr sz="1900" b="0">
+                <a:solidFill>
+                  <a:srgbClr val="162B3A"/>
+                </a:solidFill>
+                <a:latin typeface="Arial"/>
+              </a:defRPr>
+            </a:pPr>
+            <a:r>
+              <a:t>Year-5 annual revenue</a:t>
+            </a:r>
+          </a:p>
+        </p:txBody>
+      </p:sp>
+      <p:sp>
+        <p:nvSpPr>
+          <p:cNvPr id="40" name="TextBox 39"/>
+          <p:cNvSpPr txBox="1"/>
+          <p:nvPr/>
+        </p:nvSpPr>
+        <p:spPr>
+          <a:xfrm>
+            <a:off x="8412480" y="4572000"/>
+            <a:ext cx="3017520" cy="731520"/>
+          </a:xfrm>
+          <a:prstGeom prst="rect">
+            <a:avLst/>
+          </a:prstGeom>
+          <a:noFill/>
+        </p:spPr>
+        <p:txBody>
+          <a:bodyPr wrap="square" lIns="0" rIns="0" tIns="0" bIns="0">
+            <a:spAutoFit/>
+          </a:bodyPr>
+          <a:lstStyle/>
+          <a:p>
+            <a:pPr>
+              <a:spcAft>
+                <a:spcPts val="800"/>
+              </a:spcAft>
               <a:defRPr sz="3600" b="1">
                 <a:solidFill>
                   <a:srgbClr val="008A68"/>
@@ -16061,7 +17096,7 @@
       </p:sp>
       <p:sp>
         <p:nvSpPr>
-          <p:cNvPr id="11" name="TextBox 10"/>
+          <p:cNvPr id="41" name="TextBox 40"/>
           <p:cNvSpPr txBox="1"/>
           <p:nvPr/>
         </p:nvSpPr>
